--- a/prezentacie/t05w.pptx
+++ b/prezentacie/t05w.pptx
@@ -4999,7 +4999,7 @@
             </a:r>
             <a:r>
               <a:rPr lang="sk-SK" dirty="0"/>
-              <a:t>- Vážnejšie chyby, ktoré musíme ošetriť, ináč sa program ani neskompiluje a nespustí</a:t>
+              <a:t>- Vážnejšie chyby, ktoré musíme ošetriť, inak sa program ani neskompiluje a nespustí</a:t>
             </a:r>
           </a:p>
         </p:txBody>
